--- a/slides/06 - E6 - MongoDB Find.pptx
+++ b/slides/06 - E6 - MongoDB Find.pptx
@@ -236,7 +236,7 @@
           <a:p>
             <a:fld id="{8C81D565-392B-4AB9-9647-420EF17AA3FC}" type="datetimeFigureOut">
               <a:rPr lang="it-IT" smtClean="0"/>
-              <a:t>28/02/2022</a:t>
+              <a:t>10/03/2025</a:t>
             </a:fld>
             <a:endParaRPr lang="it-IT" dirty="0"/>
           </a:p>
@@ -996,7 +996,7 @@
           <a:p>
             <a:fld id="{65061730-2F0F-4B55-83F4-33856D80FFD7}" type="datetime1">
               <a:rPr lang="en-US" smtClean="0"/>
-              <a:t>2/28/2022</a:t>
+              <a:t>3/10/2025</a:t>
             </a:fld>
             <a:endParaRPr lang="en-US" dirty="0"/>
           </a:p>
@@ -1204,7 +1204,7 @@
           <a:p>
             <a:fld id="{BE1035D6-F845-4530-B289-DD4EC9CAE501}" type="datetime1">
               <a:rPr lang="en-US" smtClean="0"/>
-              <a:t>2/28/2022</a:t>
+              <a:t>3/10/2025</a:t>
             </a:fld>
             <a:endParaRPr lang="en-US" dirty="0"/>
           </a:p>
@@ -1460,7 +1460,7 @@
           <a:p>
             <a:fld id="{EDD3DE46-844C-40F1-AAA7-78AD6518D44C}" type="datetime1">
               <a:rPr lang="en-US" smtClean="0"/>
-              <a:t>2/28/2022</a:t>
+              <a:t>3/10/2025</a:t>
             </a:fld>
             <a:endParaRPr lang="en-US" dirty="0"/>
           </a:p>
@@ -1632,7 +1632,7 @@
           <a:p>
             <a:fld id="{1FCF7768-7A83-43C9-9C3D-95CD5F68D7E2}" type="datetime1">
               <a:rPr lang="en-US" smtClean="0"/>
-              <a:t>2/28/2022</a:t>
+              <a:t>3/10/2025</a:t>
             </a:fld>
             <a:endParaRPr lang="en-US" dirty="0"/>
           </a:p>
@@ -1975,7 +1975,7 @@
           <a:p>
             <a:fld id="{58DD30C4-1715-4BC2-976F-EF7BA4DC70B4}" type="datetime1">
               <a:rPr lang="en-US" smtClean="0"/>
-              <a:t>2/28/2022</a:t>
+              <a:t>3/10/2025</a:t>
             </a:fld>
             <a:endParaRPr lang="en-US" dirty="0"/>
           </a:p>
@@ -2250,7 +2250,7 @@
           <a:p>
             <a:fld id="{E92CF10C-564E-48D4-BE3A-05BB93A7F107}" type="datetime1">
               <a:rPr lang="en-US" smtClean="0"/>
-              <a:t>2/28/2022</a:t>
+              <a:t>3/10/2025</a:t>
             </a:fld>
             <a:endParaRPr lang="en-US" dirty="0"/>
           </a:p>
@@ -2629,7 +2629,7 @@
           <a:p>
             <a:fld id="{CEF5B9DB-33AD-46E7-ADFD-C52815BFEA09}" type="datetime1">
               <a:rPr lang="en-US" smtClean="0"/>
-              <a:t>2/28/2022</a:t>
+              <a:t>3/10/2025</a:t>
             </a:fld>
             <a:endParaRPr lang="en-US" dirty="0"/>
           </a:p>
@@ -2747,7 +2747,7 @@
           <a:p>
             <a:fld id="{EFC02824-932F-46A1-8D0D-D52979BEE663}" type="datetime1">
               <a:rPr lang="en-US" smtClean="0"/>
-              <a:t>2/28/2022</a:t>
+              <a:t>3/10/2025</a:t>
             </a:fld>
             <a:endParaRPr lang="en-US" dirty="0"/>
           </a:p>
@@ -2918,7 +2918,7 @@
           <a:p>
             <a:fld id="{36233CB2-1968-4F08-9AB4-83693145DE18}" type="datetime1">
               <a:rPr lang="en-US" smtClean="0"/>
-              <a:t>2/28/2022</a:t>
+              <a:t>3/10/2025</a:t>
             </a:fld>
             <a:endParaRPr lang="en-US" dirty="0"/>
           </a:p>
@@ -3273,7 +3273,7 @@
           <a:p>
             <a:fld id="{F8F6D7E5-1322-4764-A2E4-7B71FFFDE726}" type="datetime1">
               <a:rPr lang="en-US" smtClean="0"/>
-              <a:t>2/28/2022</a:t>
+              <a:t>3/10/2025</a:t>
             </a:fld>
             <a:endParaRPr lang="en-US" dirty="0"/>
           </a:p>
@@ -3651,7 +3651,7 @@
           <a:p>
             <a:fld id="{E26D0A1A-929F-4DC6-9A8A-74A15252C912}" type="datetime1">
               <a:rPr lang="en-US" smtClean="0"/>
-              <a:t>2/28/2022</a:t>
+              <a:t>3/10/2025</a:t>
             </a:fld>
             <a:endParaRPr lang="en-US" dirty="0"/>
           </a:p>
@@ -3938,7 +3938,7 @@
           <a:p>
             <a:fld id="{EDD3DE46-844C-40F1-AAA7-78AD6518D44C}" type="datetime1">
               <a:rPr lang="en-US" smtClean="0"/>
-              <a:t>2/28/2022</a:t>
+              <a:t>3/10/2025</a:t>
             </a:fld>
             <a:endParaRPr lang="en-US" dirty="0"/>
           </a:p>
